--- a/docs/business/istocklink-crm-srm-gtm.pptx
+++ b/docs/business/istocklink-crm-srm-gtm.pptx
@@ -3368,7 +3368,7 @@
                 <a:latin typeface="Calibri"/>
                 <a:ea typeface="Calibri"/>
               </a:rPr>
-              <a:t>Деньги в каналы → демо → оплаты. Сравнение с Битрикс24. Горизонт 12 месяцев.</a:t>
+              <a:t>Деньги в каналы → SQL → оплаты. Калибровка на Яндекс Директе, сентябрь 2026.</a:t>
             </a:r>
           </a:p>
         </p:txBody>
@@ -3470,7 +3470,7 @@
                 <a:latin typeface="Calibri"/>
                 <a:ea typeface="Calibri"/>
               </a:rPr>
-              <a:t>Рынок: B2B / B2G mid-market · Россия</a:t>
+              <a:t>Факт: CPL 3 447 ₽ · SQL 5 515 ₽ (сент. 2026)</a:t>
             </a:r>
           </a:p>
           <a:p>
@@ -3487,7 +3487,7 @@
                 <a:latin typeface="Calibri"/>
                 <a:ea typeface="Calibri"/>
               </a:rPr>
-              <a:t>Версия 1.1 · октябрь 2025</a:t>
+              <a:t>Версия 1.2 · октябрь 2026</a:t>
             </a:r>
           </a:p>
         </p:txBody>
@@ -4472,7 +4472,7 @@
                 <a:latin typeface="Calibri"/>
                 <a:ea typeface="Calibri"/>
               </a:rPr>
-              <a:t>БЮДЖЕТ</a:t>
+              <a:t>ФАКТ · СЕНТЯБРЬ 2026</a:t>
             </a:r>
           </a:p>
         </p:txBody>
@@ -4485,7 +4485,7 @@
         </p:nvSpPr>
         <p:spPr>
           <a:xfrm>
-            <a:off x="640080" y="1828800"/>
+            <a:off x="640080" y="1371600"/>
             <a:ext cx="10972800" cy="1005840"/>
           </a:xfrm>
           <a:prstGeom prst="rect">
@@ -4501,29 +4501,73 @@
           <a:p>
             <a:pPr algn="l"/>
             <a:r>
-              <a:rPr sz="3600" b="1">
+              <a:rPr sz="3400" b="1">
                 <a:solidFill>
                   <a:srgbClr val="FFFFFF"/>
                 </a:solidFill>
                 <a:latin typeface="Calibri"/>
                 <a:ea typeface="Calibri"/>
               </a:rPr>
-              <a:t>Сколько денег в каналы
-и какой результат возможен</a:t>
-            </a:r>
-          </a:p>
-        </p:txBody>
-      </p:sp>
-      <p:sp>
-        <p:nvSpPr>
-          <p:cNvPr id="7" name="TextBox 6"/>
-          <p:cNvSpPr txBox="1"/>
-          <p:nvPr/>
-        </p:nvSpPr>
-        <p:spPr>
-          <a:xfrm>
-            <a:off x="640080" y="3840480"/>
-            <a:ext cx="10515600" cy="731520"/>
+              <a:t>Яндекс Директ: что уже работает</a:t>
+            </a:r>
+          </a:p>
+        </p:txBody>
+      </p:sp>
+      <p:sp>
+        <p:nvSpPr>
+          <p:cNvPr id="7" name="Rounded Rectangle 6"/>
+          <p:cNvSpPr/>
+          <p:nvPr/>
+        </p:nvSpPr>
+        <p:spPr>
+          <a:xfrm>
+            <a:off x="640080" y="3017520"/>
+            <a:ext cx="2651760" cy="2194560"/>
+          </a:xfrm>
+          <a:prstGeom prst="roundRect">
+            <a:avLst>
+              <a:gd name="adj" fmla="val 8000"/>
+            </a:avLst>
+          </a:prstGeom>
+          <a:solidFill>
+            <a:srgbClr val="171717"/>
+          </a:solidFill>
+          <a:ln>
+            <a:noFill/>
+          </a:ln>
+        </p:spPr>
+        <p:style>
+          <a:lnRef idx="1">
+            <a:schemeClr val="accent1"/>
+          </a:lnRef>
+          <a:fillRef idx="3">
+            <a:schemeClr val="accent1"/>
+          </a:fillRef>
+          <a:effectRef idx="2">
+            <a:schemeClr val="accent1"/>
+          </a:effectRef>
+          <a:fontRef idx="minor">
+            <a:schemeClr val="lt1"/>
+          </a:fontRef>
+        </p:style>
+        <p:txBody>
+          <a:bodyPr rtlCol="0" anchor="ctr"/>
+          <a:lstStyle/>
+          <a:p>
+            <a:pPr algn="ctr"/>
+          </a:p>
+        </p:txBody>
+      </p:sp>
+      <p:sp>
+        <p:nvSpPr>
+          <p:cNvPr id="8" name="TextBox 7"/>
+          <p:cNvSpPr txBox="1"/>
+          <p:nvPr/>
+        </p:nvSpPr>
+        <p:spPr>
+          <a:xfrm>
+            <a:off x="822960" y="3291840"/>
+            <a:ext cx="2286000" cy="640080"/>
           </a:xfrm>
           <a:prstGeom prst="rect">
             <a:avLst/>
@@ -4538,21 +4582,408 @@
           <a:p>
             <a:pPr algn="l"/>
             <a:r>
-              <a:rPr sz="1600" b="0">
+              <a:rPr sz="2200" b="1">
+                <a:solidFill>
+                  <a:srgbClr val="1C50DE"/>
+                </a:solidFill>
+                <a:latin typeface="Calibri"/>
+                <a:ea typeface="Calibri"/>
+              </a:rPr>
+              <a:t>27 576 ₽</a:t>
+            </a:r>
+          </a:p>
+        </p:txBody>
+      </p:sp>
+      <p:sp>
+        <p:nvSpPr>
+          <p:cNvPr id="9" name="TextBox 8"/>
+          <p:cNvSpPr txBox="1"/>
+          <p:nvPr/>
+        </p:nvSpPr>
+        <p:spPr>
+          <a:xfrm>
+            <a:off x="822960" y="4114800"/>
+            <a:ext cx="2286000" cy="731520"/>
+          </a:xfrm>
+          <a:prstGeom prst="rect">
+            <a:avLst/>
+          </a:prstGeom>
+          <a:noFill/>
+        </p:spPr>
+        <p:txBody>
+          <a:bodyPr wrap="square">
+            <a:spAutoFit/>
+          </a:bodyPr>
+          <a:lstStyle/>
+          <a:p>
+            <a:pPr algn="l"/>
+            <a:r>
+              <a:rPr sz="1400" b="0">
                 <a:solidFill>
                   <a:srgbClr val="A8B0BD"/>
                 </a:solidFill>
                 <a:latin typeface="Calibri"/>
                 <a:ea typeface="Calibri"/>
               </a:rPr>
-              <a:t>Только продвижение. Не разработка. Цифры модельные — пересчитаем на ваших CPL и win rate.</a:t>
-            </a:r>
-          </a:p>
-        </p:txBody>
-      </p:sp>
-      <p:sp>
-        <p:nvSpPr>
-          <p:cNvPr id="8" name="TextBox 7"/>
+              <a:t>расход за месяц</a:t>
+            </a:r>
+          </a:p>
+        </p:txBody>
+      </p:sp>
+      <p:sp>
+        <p:nvSpPr>
+          <p:cNvPr id="10" name="Rounded Rectangle 9"/>
+          <p:cNvSpPr/>
+          <p:nvPr/>
+        </p:nvSpPr>
+        <p:spPr>
+          <a:xfrm>
+            <a:off x="3429000" y="3017520"/>
+            <a:ext cx="2651760" cy="2194560"/>
+          </a:xfrm>
+          <a:prstGeom prst="roundRect">
+            <a:avLst>
+              <a:gd name="adj" fmla="val 8000"/>
+            </a:avLst>
+          </a:prstGeom>
+          <a:solidFill>
+            <a:srgbClr val="171717"/>
+          </a:solidFill>
+          <a:ln>
+            <a:noFill/>
+          </a:ln>
+        </p:spPr>
+        <p:style>
+          <a:lnRef idx="1">
+            <a:schemeClr val="accent1"/>
+          </a:lnRef>
+          <a:fillRef idx="3">
+            <a:schemeClr val="accent1"/>
+          </a:fillRef>
+          <a:effectRef idx="2">
+            <a:schemeClr val="accent1"/>
+          </a:effectRef>
+          <a:fontRef idx="minor">
+            <a:schemeClr val="lt1"/>
+          </a:fontRef>
+        </p:style>
+        <p:txBody>
+          <a:bodyPr rtlCol="0" anchor="ctr"/>
+          <a:lstStyle/>
+          <a:p>
+            <a:pPr algn="ctr"/>
+          </a:p>
+        </p:txBody>
+      </p:sp>
+      <p:sp>
+        <p:nvSpPr>
+          <p:cNvPr id="11" name="TextBox 10"/>
+          <p:cNvSpPr txBox="1"/>
+          <p:nvPr/>
+        </p:nvSpPr>
+        <p:spPr>
+          <a:xfrm>
+            <a:off x="3611880" y="3291840"/>
+            <a:ext cx="2286000" cy="640080"/>
+          </a:xfrm>
+          <a:prstGeom prst="rect">
+            <a:avLst/>
+          </a:prstGeom>
+          <a:noFill/>
+        </p:spPr>
+        <p:txBody>
+          <a:bodyPr wrap="square">
+            <a:spAutoFit/>
+          </a:bodyPr>
+          <a:lstStyle/>
+          <a:p>
+            <a:pPr algn="l"/>
+            <a:r>
+              <a:rPr sz="2200" b="1">
+                <a:solidFill>
+                  <a:srgbClr val="1C50DE"/>
+                </a:solidFill>
+                <a:latin typeface="Calibri"/>
+                <a:ea typeface="Calibri"/>
+              </a:rPr>
+              <a:t>8 лидов</a:t>
+            </a:r>
+          </a:p>
+        </p:txBody>
+      </p:sp>
+      <p:sp>
+        <p:nvSpPr>
+          <p:cNvPr id="12" name="TextBox 11"/>
+          <p:cNvSpPr txBox="1"/>
+          <p:nvPr/>
+        </p:nvSpPr>
+        <p:spPr>
+          <a:xfrm>
+            <a:off x="3611880" y="4114800"/>
+            <a:ext cx="2286000" cy="731520"/>
+          </a:xfrm>
+          <a:prstGeom prst="rect">
+            <a:avLst/>
+          </a:prstGeom>
+          <a:noFill/>
+        </p:spPr>
+        <p:txBody>
+          <a:bodyPr wrap="square">
+            <a:spAutoFit/>
+          </a:bodyPr>
+          <a:lstStyle/>
+          <a:p>
+            <a:pPr algn="l"/>
+            <a:r>
+              <a:rPr sz="1400" b="0">
+                <a:solidFill>
+                  <a:srgbClr val="A8B0BD"/>
+                </a:solidFill>
+                <a:latin typeface="Calibri"/>
+                <a:ea typeface="Calibri"/>
+              </a:rPr>
+              <a:t>CPL 3 447 ₽</a:t>
+            </a:r>
+          </a:p>
+        </p:txBody>
+      </p:sp>
+      <p:sp>
+        <p:nvSpPr>
+          <p:cNvPr id="13" name="Rounded Rectangle 12"/>
+          <p:cNvSpPr/>
+          <p:nvPr/>
+        </p:nvSpPr>
+        <p:spPr>
+          <a:xfrm>
+            <a:off x="6217920" y="3017520"/>
+            <a:ext cx="2651760" cy="2194560"/>
+          </a:xfrm>
+          <a:prstGeom prst="roundRect">
+            <a:avLst>
+              <a:gd name="adj" fmla="val 8000"/>
+            </a:avLst>
+          </a:prstGeom>
+          <a:solidFill>
+            <a:srgbClr val="171717"/>
+          </a:solidFill>
+          <a:ln>
+            <a:noFill/>
+          </a:ln>
+        </p:spPr>
+        <p:style>
+          <a:lnRef idx="1">
+            <a:schemeClr val="accent1"/>
+          </a:lnRef>
+          <a:fillRef idx="3">
+            <a:schemeClr val="accent1"/>
+          </a:fillRef>
+          <a:effectRef idx="2">
+            <a:schemeClr val="accent1"/>
+          </a:effectRef>
+          <a:fontRef idx="minor">
+            <a:schemeClr val="lt1"/>
+          </a:fontRef>
+        </p:style>
+        <p:txBody>
+          <a:bodyPr rtlCol="0" anchor="ctr"/>
+          <a:lstStyle/>
+          <a:p>
+            <a:pPr algn="ctr"/>
+          </a:p>
+        </p:txBody>
+      </p:sp>
+      <p:sp>
+        <p:nvSpPr>
+          <p:cNvPr id="14" name="TextBox 13"/>
+          <p:cNvSpPr txBox="1"/>
+          <p:nvPr/>
+        </p:nvSpPr>
+        <p:spPr>
+          <a:xfrm>
+            <a:off x="6400800" y="3291840"/>
+            <a:ext cx="2286000" cy="640080"/>
+          </a:xfrm>
+          <a:prstGeom prst="rect">
+            <a:avLst/>
+          </a:prstGeom>
+          <a:noFill/>
+        </p:spPr>
+        <p:txBody>
+          <a:bodyPr wrap="square">
+            <a:spAutoFit/>
+          </a:bodyPr>
+          <a:lstStyle/>
+          <a:p>
+            <a:pPr algn="l"/>
+            <a:r>
+              <a:rPr sz="2200" b="1">
+                <a:solidFill>
+                  <a:srgbClr val="1C50DE"/>
+                </a:solidFill>
+                <a:latin typeface="Calibri"/>
+                <a:ea typeface="Calibri"/>
+              </a:rPr>
+              <a:t>5 SQL</a:t>
+            </a:r>
+          </a:p>
+        </p:txBody>
+      </p:sp>
+      <p:sp>
+        <p:nvSpPr>
+          <p:cNvPr id="15" name="TextBox 14"/>
+          <p:cNvSpPr txBox="1"/>
+          <p:nvPr/>
+        </p:nvSpPr>
+        <p:spPr>
+          <a:xfrm>
+            <a:off x="6400800" y="4114800"/>
+            <a:ext cx="2286000" cy="731520"/>
+          </a:xfrm>
+          <a:prstGeom prst="rect">
+            <a:avLst/>
+          </a:prstGeom>
+          <a:noFill/>
+        </p:spPr>
+        <p:txBody>
+          <a:bodyPr wrap="square">
+            <a:spAutoFit/>
+          </a:bodyPr>
+          <a:lstStyle/>
+          <a:p>
+            <a:pPr algn="l"/>
+            <a:r>
+              <a:rPr sz="1400" b="0">
+                <a:solidFill>
+                  <a:srgbClr val="A8B0BD"/>
+                </a:solidFill>
+                <a:latin typeface="Calibri"/>
+                <a:ea typeface="Calibri"/>
+              </a:rPr>
+              <a:t>5 515 ₽ / SQL</a:t>
+            </a:r>
+          </a:p>
+        </p:txBody>
+      </p:sp>
+      <p:sp>
+        <p:nvSpPr>
+          <p:cNvPr id="16" name="Rounded Rectangle 15"/>
+          <p:cNvSpPr/>
+          <p:nvPr/>
+        </p:nvSpPr>
+        <p:spPr>
+          <a:xfrm>
+            <a:off x="9006840" y="3017520"/>
+            <a:ext cx="2651760" cy="2194560"/>
+          </a:xfrm>
+          <a:prstGeom prst="roundRect">
+            <a:avLst>
+              <a:gd name="adj" fmla="val 8000"/>
+            </a:avLst>
+          </a:prstGeom>
+          <a:solidFill>
+            <a:srgbClr val="171717"/>
+          </a:solidFill>
+          <a:ln>
+            <a:noFill/>
+          </a:ln>
+        </p:spPr>
+        <p:style>
+          <a:lnRef idx="1">
+            <a:schemeClr val="accent1"/>
+          </a:lnRef>
+          <a:fillRef idx="3">
+            <a:schemeClr val="accent1"/>
+          </a:fillRef>
+          <a:effectRef idx="2">
+            <a:schemeClr val="accent1"/>
+          </a:effectRef>
+          <a:fontRef idx="minor">
+            <a:schemeClr val="lt1"/>
+          </a:fontRef>
+        </p:style>
+        <p:txBody>
+          <a:bodyPr rtlCol="0" anchor="ctr"/>
+          <a:lstStyle/>
+          <a:p>
+            <a:pPr algn="ctr"/>
+          </a:p>
+        </p:txBody>
+      </p:sp>
+      <p:sp>
+        <p:nvSpPr>
+          <p:cNvPr id="17" name="TextBox 16"/>
+          <p:cNvSpPr txBox="1"/>
+          <p:nvPr/>
+        </p:nvSpPr>
+        <p:spPr>
+          <a:xfrm>
+            <a:off x="9189720" y="3291840"/>
+            <a:ext cx="2286000" cy="640080"/>
+          </a:xfrm>
+          <a:prstGeom prst="rect">
+            <a:avLst/>
+          </a:prstGeom>
+          <a:noFill/>
+        </p:spPr>
+        <p:txBody>
+          <a:bodyPr wrap="square">
+            <a:spAutoFit/>
+          </a:bodyPr>
+          <a:lstStyle/>
+          <a:p>
+            <a:pPr algn="l"/>
+            <a:r>
+              <a:rPr sz="2200" b="1">
+                <a:solidFill>
+                  <a:srgbClr val="1C50DE"/>
+                </a:solidFill>
+                <a:latin typeface="Calibri"/>
+                <a:ea typeface="Calibri"/>
+              </a:rPr>
+              <a:t>62%</a:t>
+            </a:r>
+          </a:p>
+        </p:txBody>
+      </p:sp>
+      <p:sp>
+        <p:nvSpPr>
+          <p:cNvPr id="18" name="TextBox 17"/>
+          <p:cNvSpPr txBox="1"/>
+          <p:nvPr/>
+        </p:nvSpPr>
+        <p:spPr>
+          <a:xfrm>
+            <a:off x="9189720" y="4114800"/>
+            <a:ext cx="2286000" cy="731520"/>
+          </a:xfrm>
+          <a:prstGeom prst="rect">
+            <a:avLst/>
+          </a:prstGeom>
+          <a:noFill/>
+        </p:spPr>
+        <p:txBody>
+          <a:bodyPr wrap="square">
+            <a:spAutoFit/>
+          </a:bodyPr>
+          <a:lstStyle/>
+          <a:p>
+            <a:pPr algn="l"/>
+            <a:r>
+              <a:rPr sz="1400" b="0">
+                <a:solidFill>
+                  <a:srgbClr val="A8B0BD"/>
+                </a:solidFill>
+                <a:latin typeface="Calibri"/>
+                <a:ea typeface="Calibri"/>
+              </a:rPr>
+              <a:t>Lead → SQL</a:t>
+            </a:r>
+          </a:p>
+        </p:txBody>
+      </p:sp>
+      <p:sp>
+        <p:nvSpPr>
+          <p:cNvPr id="19" name="TextBox 18"/>
           <p:cNvSpPr txBox="1"/>
           <p:nvPr/>
         </p:nvSpPr>
@@ -4581,14 +5012,14 @@
                 <a:latin typeface="Calibri"/>
                 <a:ea typeface="Calibri"/>
               </a:rPr>
-              <a:t>Бюджет</a:t>
-            </a:r>
-          </a:p>
-        </p:txBody>
-      </p:sp>
-      <p:sp>
-        <p:nvSpPr>
-          <p:cNvPr id="9" name="TextBox 8"/>
+              <a:t>Факт Директа</a:t>
+            </a:r>
+          </a:p>
+        </p:txBody>
+      </p:sp>
+      <p:sp>
+        <p:nvSpPr>
+          <p:cNvPr id="20" name="TextBox 19"/>
           <p:cNvSpPr txBox="1"/>
           <p:nvPr/>
         </p:nvSpPr>
@@ -4829,7 +5260,7 @@
                 <a:latin typeface="Calibri"/>
                 <a:ea typeface="Calibri"/>
               </a:rPr>
-              <a:t>Допущения до калибровки на ваших данных</a:t>
+              <a:t>Допущения после калибровки</a:t>
             </a:r>
           </a:p>
         </p:txBody>
@@ -4988,7 +5419,7 @@
                           <a:latin typeface="Calibri"/>
                           <a:ea typeface="Calibri"/>
                         </a:rPr>
-                        <a:t>~8–12 пользователей / пакет</a:t>
+                        <a:t>Уточнить по факту сделок</a:t>
                       </a:r>
                     </a:p>
                   </a:txBody>
@@ -5013,7 +5444,7 @@
                           <a:latin typeface="Calibri"/>
                           <a:ea typeface="Calibri"/>
                         </a:rPr>
-                        <a:t>CPL (заявка на демо)</a:t>
+                        <a:t>Cost / SQL сейчас</a:t>
                       </a:r>
                     </a:p>
                   </a:txBody>
@@ -5036,7 +5467,7 @@
                           <a:latin typeface="Calibri"/>
                           <a:ea typeface="Calibri"/>
                         </a:rPr>
-                        <a:t>4 500–9 000 ₽</a:t>
+                        <a:t>~5 500 ₽</a:t>
                       </a:r>
                     </a:p>
                   </a:txBody>
@@ -5059,7 +5490,7 @@
                           <a:latin typeface="Calibri"/>
                           <a:ea typeface="Calibri"/>
                         </a:rPr>
-                        <a:t>B2B mid-market RU</a:t>
+                        <a:t>Факт сентября</a:t>
                       </a:r>
                     </a:p>
                   </a:txBody>
@@ -5084,7 +5515,7 @@
                           <a:latin typeface="Calibri"/>
                           <a:ea typeface="Calibri"/>
                         </a:rPr>
-                        <a:t>Lead → демо</a:t>
+                        <a:t>Cost / SQL при масштабе</a:t>
                       </a:r>
                     </a:p>
                   </a:txBody>
@@ -5107,7 +5538,7 @@
                           <a:latin typeface="Calibri"/>
                           <a:ea typeface="Calibri"/>
                         </a:rPr>
-                        <a:t>45%</a:t>
+                        <a:t>6–10 тыс. ₽</a:t>
                       </a:r>
                     </a:p>
                   </a:txBody>
@@ -5130,7 +5561,7 @@
                           <a:latin typeface="Calibri"/>
                           <a:ea typeface="Calibri"/>
                         </a:rPr>
-                        <a:t>После квалификации</a:t>
+                        <a:t>Рост аукциона</a:t>
                       </a:r>
                     </a:p>
                   </a:txBody>
@@ -5155,7 +5586,7 @@
                           <a:latin typeface="Calibri"/>
                           <a:ea typeface="Calibri"/>
                         </a:rPr>
-                        <a:t>Демо → оплата</a:t>
+                        <a:t>Lead → SQL</a:t>
                       </a:r>
                     </a:p>
                   </a:txBody>
@@ -5178,7 +5609,7 @@
                           <a:latin typeface="Calibri"/>
                           <a:ea typeface="Calibri"/>
                         </a:rPr>
-                        <a:t>22%</a:t>
+                        <a:t>62%</a:t>
                       </a:r>
                     </a:p>
                   </a:txBody>
@@ -5201,7 +5632,7 @@
                           <a:latin typeface="Calibri"/>
                           <a:ea typeface="Calibri"/>
                         </a:rPr>
-                        <a:t>С пилотом 14 дней</a:t>
+                        <a:t>5 из 8</a:t>
                       </a:r>
                     </a:p>
                   </a:txBody>
@@ -5226,7 +5657,7 @@
                           <a:latin typeface="Calibri"/>
                           <a:ea typeface="Calibri"/>
                         </a:rPr>
-                        <a:t>Цикл сделки</a:t>
+                        <a:t>SQL → оплата</a:t>
                       </a:r>
                     </a:p>
                   </a:txBody>
@@ -5249,7 +5680,7 @@
                           <a:latin typeface="Calibri"/>
                           <a:ea typeface="Calibri"/>
                         </a:rPr>
-                        <a:t>30–60 дней</a:t>
+                        <a:t>15% / 22% / 28%</a:t>
                       </a:r>
                     </a:p>
                   </a:txBody>
@@ -5272,7 +5703,7 @@
                           <a:latin typeface="Calibri"/>
                           <a:ea typeface="Calibri"/>
                         </a:rPr>
-                        <a:t>Часть сделок уедет в след. период</a:t>
+                        <a:t>Факта закрытий пока нет</a:t>
                       </a:r>
                     </a:p>
                   </a:txBody>
@@ -5647,7 +6078,7 @@
                 <a:latin typeface="Calibri"/>
                 <a:ea typeface="Calibri"/>
               </a:rPr>
-              <a:t>A · Тест</a:t>
+              <a:t>A · Разогрев</a:t>
             </a:r>
           </a:p>
         </p:txBody>
@@ -5676,7 +6107,7 @@
           <a:p>
             <a:pPr algn="l"/>
             <a:r>
-              <a:rPr sz="2000" b="1">
+              <a:rPr sz="1800" b="1">
                 <a:solidFill>
                   <a:srgbClr val="0B0B0B"/>
                 </a:solidFill>
@@ -5723,7 +6154,7 @@
                 <a:latin typeface="Calibri"/>
                 <a:ea typeface="Calibri"/>
               </a:rPr>
-              <a:t>1,8 млн / год</a:t>
+              <a:t>SQL ~300 / год</a:t>
             </a:r>
           </a:p>
           <a:p>
@@ -5740,7 +6171,7 @@
                 <a:latin typeface="Calibri"/>
                 <a:ea typeface="Calibri"/>
               </a:rPr>
-              <a:t>20–30 оплат / год</a:t>
+              <a:t>~66 оплат* при win 22%</a:t>
             </a:r>
           </a:p>
           <a:p>
@@ -5757,7 +6188,7 @@
                 <a:latin typeface="Calibri"/>
                 <a:ea typeface="Calibri"/>
               </a:rPr>
-              <a:t>Выручка: 2,4–3,6 млн ₽</a:t>
+              <a:t>Выручка: ~7,9 млн ₽</a:t>
             </a:r>
           </a:p>
           <a:p>
@@ -5774,7 +6205,7 @@
                 <a:latin typeface="Calibri"/>
                 <a:ea typeface="Calibri"/>
               </a:rPr>
-              <a:t>Низкий шанс масштаба</a:t>
+              <a:t>Рекомендуемый следующий шаг</a:t>
             </a:r>
           </a:p>
         </p:txBody>
@@ -5884,7 +6315,7 @@
           <a:p>
             <a:pPr algn="l"/>
             <a:r>
-              <a:rPr sz="2000" b="1">
+              <a:rPr sz="1800" b="1">
                 <a:solidFill>
                   <a:srgbClr val="0B0B0B"/>
                 </a:solidFill>
@@ -5931,7 +6362,7 @@
                 <a:latin typeface="Calibri"/>
                 <a:ea typeface="Calibri"/>
               </a:rPr>
-              <a:t>3,6 млн / год</a:t>
+              <a:t>SQL ~480 / год</a:t>
             </a:r>
           </a:p>
           <a:p>
@@ -5948,7 +6379,7 @@
                 <a:latin typeface="Calibri"/>
                 <a:ea typeface="Calibri"/>
               </a:rPr>
-              <a:t>45–70 оплат / год</a:t>
+              <a:t>~106 оплат* при win 22%</a:t>
             </a:r>
           </a:p>
           <a:p>
@@ -5965,7 +6396,7 @@
                 <a:latin typeface="Calibri"/>
                 <a:ea typeface="Calibri"/>
               </a:rPr>
-              <a:t>Выручка: 5,4–8,4 млн ₽</a:t>
+              <a:t>Выручка: ~12,7 млн ₽</a:t>
             </a:r>
           </a:p>
           <a:p>
@@ -5982,7 +6413,7 @@
                 <a:latin typeface="Calibri"/>
                 <a:ea typeface="Calibri"/>
               </a:rPr>
-              <a:t>Средний / рабочий</a:t>
+              <a:t>После фиксации win rate</a:t>
             </a:r>
           </a:p>
         </p:txBody>
@@ -6092,7 +6523,7 @@
           <a:p>
             <a:pPr algn="l"/>
             <a:r>
-              <a:rPr sz="2000" b="1">
+              <a:rPr sz="1800" b="1">
                 <a:solidFill>
                   <a:srgbClr val="0B0B0B"/>
                 </a:solidFill>
@@ -6139,7 +6570,7 @@
                 <a:latin typeface="Calibri"/>
                 <a:ea typeface="Calibri"/>
               </a:rPr>
-              <a:t>7,2 млн / год</a:t>
+              <a:t>SQL ~720 / год</a:t>
             </a:r>
           </a:p>
           <a:p>
@@ -6156,7 +6587,7 @@
                 <a:latin typeface="Calibri"/>
                 <a:ea typeface="Calibri"/>
               </a:rPr>
-              <a:t>90–130 оплат / год</a:t>
+              <a:t>~158 оплат* при win 22%</a:t>
             </a:r>
           </a:p>
           <a:p>
@@ -6173,7 +6604,7 @@
                 <a:latin typeface="Calibri"/>
                 <a:ea typeface="Calibri"/>
               </a:rPr>
-              <a:t>Выручка: 10,8–15,6 млн ₽</a:t>
+              <a:t>Выручка: ~19 млн ₽</a:t>
             </a:r>
           </a:p>
           <a:p>
@@ -6190,7 +6621,7 @@
                 <a:latin typeface="Calibri"/>
                 <a:ea typeface="Calibri"/>
               </a:rPr>
-              <a:t>Выше при sales capacity</a:t>
+              <a:t>Нужны сайт + 2+ продавца</a:t>
             </a:r>
           </a:p>
         </p:txBody>
@@ -9897,14 +10328,14 @@
           <a:p>
             <a:pPr algn="l"/>
             <a:r>
-              <a:rPr sz="3200" b="1">
+              <a:rPr sz="3000" b="1">
                 <a:solidFill>
                   <a:srgbClr val="FFFFFF"/>
                 </a:solidFill>
                 <a:latin typeface="Calibri"/>
                 <a:ea typeface="Calibri"/>
               </a:rPr>
-              <a:t>Что пришлите — пересчитаем сценарии</a:t>
+              <a:t>Директ учтён. Не хватает закрытий</a:t>
             </a:r>
           </a:p>
         </p:txBody>
@@ -9976,7 +10407,7 @@
                 <a:latin typeface="Calibri"/>
                 <a:ea typeface="Calibri"/>
               </a:rPr>
-              <a:t>Сводка рекламы 3–6 мес.</a:t>
+              <a:t>CRM: SQL → оплата</a:t>
             </a:r>
           </a:p>
         </p:txBody>
@@ -10012,7 +10443,7 @@
                 <a:latin typeface="Calibri"/>
                 <a:ea typeface="Calibri"/>
               </a:rPr>
-              <a:t>Кампания → расход → клики → заявки → CPL</a:t>
+              <a:t>По 5 SQL сентября — статус, тариф, won/lost</a:t>
             </a:r>
           </a:p>
         </p:txBody>
@@ -10084,7 +10515,7 @@
                 <a:latin typeface="Calibri"/>
                 <a:ea typeface="Calibri"/>
               </a:rPr>
-              <a:t>Касания / воронка</a:t>
+              <a:t>Касания 3–6 мес.</a:t>
             </a:r>
           </a:p>
         </p:txBody>
@@ -10120,7 +10551,7 @@
                 <a:latin typeface="Calibri"/>
                 <a:ea typeface="Calibri"/>
               </a:rPr>
-              <a:t>Источник, этап, демо, won/lost, тариф</a:t>
+              <a:t>Источник / UTM, этап, сумма — для win rate</a:t>
             </a:r>
           </a:p>
         </p:txBody>
@@ -10192,7 +10623,7 @@
                 <a:latin typeface="Calibri"/>
                 <a:ea typeface="Calibri"/>
               </a:rPr>
-              <a:t>Ваш сводный отчёт</a:t>
+              <a:t>Средний чек</a:t>
             </a:r>
           </a:p>
         </p:txBody>
@@ -10228,7 +10659,7 @@
                 <a:latin typeface="Calibri"/>
                 <a:ea typeface="Calibri"/>
               </a:rPr>
-              <a:t>Если уже есть — одного файла достаточно</a:t>
+              <a:t>Факт ACV по оплаченным аккаунтам</a:t>
             </a:r>
           </a:p>
         </p:txBody>
@@ -10512,7 +10943,7 @@
                 <a:latin typeface="Calibri"/>
                 <a:ea typeface="Calibri"/>
               </a:rPr>
-              <a:t>Базовый сценарий для старта: B</a:t>
+              <a:t>Следующий шаг: сценарий A</a:t>
             </a:r>
           </a:p>
         </p:txBody>
@@ -10548,7 +10979,7 @@
                 <a:latin typeface="Calibri"/>
                 <a:ea typeface="Calibri"/>
               </a:rPr>
-              <a:t>300 тыс ₽/мес · ~45–70 оплат/год · 5,4–8,4 млн ₽ выручки year-1 (модель).</a:t>
+              <a:t>150 тыс ₽/мес · ~300 SQL/год · ~66 оплат при win 22% · ~7,9 млн ₽ (модель).</a:t>
             </a:r>
           </a:p>
         </p:txBody>
@@ -10584,7 +11015,7 @@
                 <a:latin typeface="Calibri"/>
                 <a:ea typeface="Calibri"/>
               </a:rPr>
-              <a:t>После ваших выгрузок зафиксируем CPL, win rate и финальный бюджет.</a:t>
+              <a:t>Сейчас ~28 тыс ₽/мес. Сначала ×5 и замер win rate, потом B/C.</a:t>
             </a:r>
           </a:p>
         </p:txBody>
